--- a/PPTs/L2-Processes Threads.pptx
+++ b/PPTs/L2-Processes Threads.pptx
@@ -5,10 +5,10 @@
     <p:sldMasterId id="2147483648" r:id="rId1"/>
   </p:sldMasterIdLst>
   <p:notesMasterIdLst>
-    <p:notesMasterId r:id="rId41"/>
+    <p:notesMasterId r:id="rId42"/>
   </p:notesMasterIdLst>
   <p:handoutMasterIdLst>
-    <p:handoutMasterId r:id="rId42"/>
+    <p:handoutMasterId r:id="rId43"/>
   </p:handoutMasterIdLst>
   <p:sldIdLst>
     <p:sldId id="799" r:id="rId2"/>
@@ -50,6 +50,7 @@
     <p:sldId id="809" r:id="rId38"/>
     <p:sldId id="285" r:id="rId39"/>
     <p:sldId id="306" r:id="rId40"/>
+    <p:sldId id="825" r:id="rId41"/>
   </p:sldIdLst>
   <p:sldSz cx="12192000" cy="6858000"/>
   <p:notesSz cx="9601200" cy="7315200"/>
@@ -223,6 +224,7 @@
             <p14:sldId id="809"/>
             <p14:sldId id="285"/>
             <p14:sldId id="306"/>
+            <p14:sldId id="825"/>
           </p14:sldIdLst>
         </p14:section>
       </p14:sectionLst>
@@ -248,7 +250,7 @@
 <file path=ppt/revisionInfo.xml><?xml version="1.0" encoding="utf-8"?>
 <p1510:revInfo xmlns:a="http://schemas.openxmlformats.org/drawingml/2006/main" xmlns:r="http://schemas.openxmlformats.org/officeDocument/2006/relationships" xmlns:p1510="http://schemas.microsoft.com/office/powerpoint/2015/10/main">
   <p1510:revLst>
-    <p1510:client id="{0132A8DD-0A6B-4C84-9487-37DF9EE63DAE}" v="4" dt="2025-09-05T02:43:44.547"/>
+    <p1510:client id="{4CC796C1-FBF1-46F6-96B3-3068BF3DF33C}" v="5" dt="2025-10-29T21:42:11.292"/>
   </p1510:revLst>
 </p1510:revInfo>
 </file>
@@ -257,280 +259,31 @@
 <pc:chgInfo xmlns:a="http://schemas.openxmlformats.org/drawingml/2006/main" xmlns:r="http://schemas.openxmlformats.org/officeDocument/2006/relationships" xmlns:ac="http://schemas.microsoft.com/office/drawing/2013/main/command" xmlns:pc="http://schemas.microsoft.com/office/powerpoint/2013/main/command">
   <pc:docChgLst>
     <pc:chgData name="Zonghua Gu" userId="9a7e1853e1951ef5" providerId="LiveId" clId="{CF1FAA12-072C-4ED5-BA76-0FFFAEFDB88A}"/>
-    <pc:docChg chg="undo custSel modSld">
-      <pc:chgData name="Zonghua Gu" userId="9a7e1853e1951ef5" providerId="LiveId" clId="{CF1FAA12-072C-4ED5-BA76-0FFFAEFDB88A}" dt="2025-09-05T02:45:05.862" v="135" actId="20577"/>
+    <pc:docChg chg="undo custSel addSld modSld modSection">
+      <pc:chgData name="Zonghua Gu" userId="9a7e1853e1951ef5" providerId="LiveId" clId="{CF1FAA12-072C-4ED5-BA76-0FFFAEFDB88A}" dt="2025-10-29T21:42:11.276" v="158" actId="20577"/>
       <pc:docMkLst>
         <pc:docMk/>
       </pc:docMkLst>
-      <pc:sldChg chg="delSp mod">
-        <pc:chgData name="Zonghua Gu" userId="9a7e1853e1951ef5" providerId="LiveId" clId="{CF1FAA12-072C-4ED5-BA76-0FFFAEFDB88A}" dt="2025-09-05T02:37:36.716" v="0" actId="478"/>
+      <pc:sldChg chg="modSp new mod">
+        <pc:chgData name="Zonghua Gu" userId="9a7e1853e1951ef5" providerId="LiveId" clId="{CF1FAA12-072C-4ED5-BA76-0FFFAEFDB88A}" dt="2025-10-29T21:42:11.276" v="158" actId="20577"/>
         <pc:sldMkLst>
           <pc:docMk/>
-          <pc:sldMk cId="1914696869" sldId="276"/>
+          <pc:sldMk cId="2837122745" sldId="825"/>
         </pc:sldMkLst>
-        <pc:spChg chg="del">
-          <ac:chgData name="Zonghua Gu" userId="9a7e1853e1951ef5" providerId="LiveId" clId="{CF1FAA12-072C-4ED5-BA76-0FFFAEFDB88A}" dt="2025-09-05T02:37:36.716" v="0" actId="478"/>
+        <pc:spChg chg="mod">
+          <ac:chgData name="Zonghua Gu" userId="9a7e1853e1951ef5" providerId="LiveId" clId="{CF1FAA12-072C-4ED5-BA76-0FFFAEFDB88A}" dt="2025-10-29T21:41:46.237" v="148" actId="20577"/>
           <ac:spMkLst>
             <pc:docMk/>
-            <pc:sldMk cId="1914696869" sldId="276"/>
-            <ac:spMk id="6" creationId="{BD13F078-3DD1-AB00-BEE1-DFA30BF505BB}"/>
+            <pc:sldMk cId="2837122745" sldId="825"/>
+            <ac:spMk id="2" creationId="{9E114B97-3E14-9811-9760-3827DC98046F}"/>
           </ac:spMkLst>
         </pc:spChg>
-      </pc:sldChg>
-      <pc:sldChg chg="delSp mod">
-        <pc:chgData name="Zonghua Gu" userId="9a7e1853e1951ef5" providerId="LiveId" clId="{CF1FAA12-072C-4ED5-BA76-0FFFAEFDB88A}" dt="2025-09-05T02:37:43.120" v="1" actId="478"/>
-        <pc:sldMkLst>
-          <pc:docMk/>
-          <pc:sldMk cId="2522470081" sldId="277"/>
-        </pc:sldMkLst>
-        <pc:spChg chg="del">
-          <ac:chgData name="Zonghua Gu" userId="9a7e1853e1951ef5" providerId="LiveId" clId="{CF1FAA12-072C-4ED5-BA76-0FFFAEFDB88A}" dt="2025-09-05T02:37:43.120" v="1" actId="478"/>
+        <pc:spChg chg="mod">
+          <ac:chgData name="Zonghua Gu" userId="9a7e1853e1951ef5" providerId="LiveId" clId="{CF1FAA12-072C-4ED5-BA76-0FFFAEFDB88A}" dt="2025-10-29T21:42:11.276" v="158" actId="20577"/>
           <ac:spMkLst>
             <pc:docMk/>
-            <pc:sldMk cId="2522470081" sldId="277"/>
-            <ac:spMk id="4" creationId="{6701F35C-325E-C0BB-1DC0-F9C992C0031E}"/>
-          </ac:spMkLst>
-        </pc:spChg>
-      </pc:sldChg>
-      <pc:sldChg chg="delSp mod">
-        <pc:chgData name="Zonghua Gu" userId="9a7e1853e1951ef5" providerId="LiveId" clId="{CF1FAA12-072C-4ED5-BA76-0FFFAEFDB88A}" dt="2025-09-05T02:37:50.566" v="2" actId="478"/>
-        <pc:sldMkLst>
-          <pc:docMk/>
-          <pc:sldMk cId="3380590396" sldId="278"/>
-        </pc:sldMkLst>
-        <pc:spChg chg="del">
-          <ac:chgData name="Zonghua Gu" userId="9a7e1853e1951ef5" providerId="LiveId" clId="{CF1FAA12-072C-4ED5-BA76-0FFFAEFDB88A}" dt="2025-09-05T02:37:50.566" v="2" actId="478"/>
-          <ac:spMkLst>
-            <pc:docMk/>
-            <pc:sldMk cId="3380590396" sldId="278"/>
-            <ac:spMk id="4" creationId="{CA92268A-2DCE-0BDC-31AD-54BC4E61A1D2}"/>
-          </ac:spMkLst>
-        </pc:spChg>
-      </pc:sldChg>
-      <pc:sldChg chg="modSp mod">
-        <pc:chgData name="Zonghua Gu" userId="9a7e1853e1951ef5" providerId="LiveId" clId="{CF1FAA12-072C-4ED5-BA76-0FFFAEFDB88A}" dt="2025-09-05T02:38:06.818" v="5"/>
-        <pc:sldMkLst>
-          <pc:docMk/>
-          <pc:sldMk cId="1712126727" sldId="280"/>
-        </pc:sldMkLst>
-        <pc:spChg chg="mod">
-          <ac:chgData name="Zonghua Gu" userId="9a7e1853e1951ef5" providerId="LiveId" clId="{CF1FAA12-072C-4ED5-BA76-0FFFAEFDB88A}" dt="2025-09-05T02:38:06.818" v="5"/>
-          <ac:spMkLst>
-            <pc:docMk/>
-            <pc:sldMk cId="1712126727" sldId="280"/>
-            <ac:spMk id="3" creationId="{FC7524D1-ADBD-8C45-9DC3-F343D7DEE3B6}"/>
-          </ac:spMkLst>
-        </pc:spChg>
-      </pc:sldChg>
-      <pc:sldChg chg="delSp modSp mod">
-        <pc:chgData name="Zonghua Gu" userId="9a7e1853e1951ef5" providerId="LiveId" clId="{CF1FAA12-072C-4ED5-BA76-0FFFAEFDB88A}" dt="2025-09-05T02:39:24.732" v="20" actId="20577"/>
-        <pc:sldMkLst>
-          <pc:docMk/>
-          <pc:sldMk cId="3282455432" sldId="281"/>
-        </pc:sldMkLst>
-        <pc:spChg chg="mod">
-          <ac:chgData name="Zonghua Gu" userId="9a7e1853e1951ef5" providerId="LiveId" clId="{CF1FAA12-072C-4ED5-BA76-0FFFAEFDB88A}" dt="2025-09-05T02:39:24.732" v="20" actId="20577"/>
-          <ac:spMkLst>
-            <pc:docMk/>
-            <pc:sldMk cId="3282455432" sldId="281"/>
-            <ac:spMk id="3" creationId="{FC7524D1-ADBD-8C45-9DC3-F343D7DEE3B6}"/>
-          </ac:spMkLst>
-        </pc:spChg>
-        <pc:spChg chg="del">
-          <ac:chgData name="Zonghua Gu" userId="9a7e1853e1951ef5" providerId="LiveId" clId="{CF1FAA12-072C-4ED5-BA76-0FFFAEFDB88A}" dt="2025-09-05T02:38:41.280" v="6" actId="478"/>
-          <ac:spMkLst>
-            <pc:docMk/>
-            <pc:sldMk cId="3282455432" sldId="281"/>
-            <ac:spMk id="5" creationId="{27B5FD14-8E36-C521-CB54-A044189C7339}"/>
-          </ac:spMkLst>
-        </pc:spChg>
-      </pc:sldChg>
-      <pc:sldChg chg="delSp mod">
-        <pc:chgData name="Zonghua Gu" userId="9a7e1853e1951ef5" providerId="LiveId" clId="{CF1FAA12-072C-4ED5-BA76-0FFFAEFDB88A}" dt="2025-09-05T02:39:59.159" v="21" actId="478"/>
-        <pc:sldMkLst>
-          <pc:docMk/>
-          <pc:sldMk cId="9699727" sldId="286"/>
-        </pc:sldMkLst>
-        <pc:spChg chg="del">
-          <ac:chgData name="Zonghua Gu" userId="9a7e1853e1951ef5" providerId="LiveId" clId="{CF1FAA12-072C-4ED5-BA76-0FFFAEFDB88A}" dt="2025-09-05T02:39:59.159" v="21" actId="478"/>
-          <ac:spMkLst>
-            <pc:docMk/>
-            <pc:sldMk cId="9699727" sldId="286"/>
-            <ac:spMk id="4" creationId="{3758AFB3-277B-2A04-CEB6-73BEDD8904DB}"/>
-          </ac:spMkLst>
-        </pc:spChg>
-      </pc:sldChg>
-      <pc:sldChg chg="delSp mod">
-        <pc:chgData name="Zonghua Gu" userId="9a7e1853e1951ef5" providerId="LiveId" clId="{CF1FAA12-072C-4ED5-BA76-0FFFAEFDB88A}" dt="2025-09-05T02:40:27.839" v="52" actId="478"/>
-        <pc:sldMkLst>
-          <pc:docMk/>
-          <pc:sldMk cId="705927903" sldId="290"/>
-        </pc:sldMkLst>
-        <pc:spChg chg="del">
-          <ac:chgData name="Zonghua Gu" userId="9a7e1853e1951ef5" providerId="LiveId" clId="{CF1FAA12-072C-4ED5-BA76-0FFFAEFDB88A}" dt="2025-09-05T02:40:27.839" v="52" actId="478"/>
-          <ac:spMkLst>
-            <pc:docMk/>
-            <pc:sldMk cId="705927903" sldId="290"/>
-            <ac:spMk id="4" creationId="{69DFB8A3-E1BE-C334-A263-0CE5196DCBE9}"/>
-          </ac:spMkLst>
-        </pc:spChg>
-      </pc:sldChg>
-      <pc:sldChg chg="delSp modSp mod">
-        <pc:chgData name="Zonghua Gu" userId="9a7e1853e1951ef5" providerId="LiveId" clId="{CF1FAA12-072C-4ED5-BA76-0FFFAEFDB88A}" dt="2025-09-05T02:40:46.190" v="56" actId="20577"/>
-        <pc:sldMkLst>
-          <pc:docMk/>
-          <pc:sldMk cId="1343251076" sldId="291"/>
-        </pc:sldMkLst>
-        <pc:spChg chg="mod">
-          <ac:chgData name="Zonghua Gu" userId="9a7e1853e1951ef5" providerId="LiveId" clId="{CF1FAA12-072C-4ED5-BA76-0FFFAEFDB88A}" dt="2025-09-05T02:40:46.190" v="56" actId="20577"/>
-          <ac:spMkLst>
-            <pc:docMk/>
-            <pc:sldMk cId="1343251076" sldId="291"/>
-            <ac:spMk id="3" creationId="{EEADE77D-C9B0-BC37-6639-E5FD1A7A5D3A}"/>
-          </ac:spMkLst>
-        </pc:spChg>
-        <pc:spChg chg="del">
-          <ac:chgData name="Zonghua Gu" userId="9a7e1853e1951ef5" providerId="LiveId" clId="{CF1FAA12-072C-4ED5-BA76-0FFFAEFDB88A}" dt="2025-09-05T02:40:33.187" v="53" actId="478"/>
-          <ac:spMkLst>
-            <pc:docMk/>
-            <pc:sldMk cId="1343251076" sldId="291"/>
-            <ac:spMk id="5" creationId="{661CF0C1-7A6D-A792-9708-069317353B40}"/>
-          </ac:spMkLst>
-        </pc:spChg>
-      </pc:sldChg>
-      <pc:sldChg chg="delSp mod">
-        <pc:chgData name="Zonghua Gu" userId="9a7e1853e1951ef5" providerId="LiveId" clId="{CF1FAA12-072C-4ED5-BA76-0FFFAEFDB88A}" dt="2025-09-05T02:40:55.275" v="57" actId="478"/>
-        <pc:sldMkLst>
-          <pc:docMk/>
-          <pc:sldMk cId="472040141" sldId="292"/>
-        </pc:sldMkLst>
-        <pc:spChg chg="del">
-          <ac:chgData name="Zonghua Gu" userId="9a7e1853e1951ef5" providerId="LiveId" clId="{CF1FAA12-072C-4ED5-BA76-0FFFAEFDB88A}" dt="2025-09-05T02:40:55.275" v="57" actId="478"/>
-          <ac:spMkLst>
-            <pc:docMk/>
-            <pc:sldMk cId="472040141" sldId="292"/>
-            <ac:spMk id="4" creationId="{E6E37ACA-281C-049F-BE91-61F2D9344249}"/>
-          </ac:spMkLst>
-        </pc:spChg>
-      </pc:sldChg>
-      <pc:sldChg chg="delSp modSp mod">
-        <pc:chgData name="Zonghua Gu" userId="9a7e1853e1951ef5" providerId="LiveId" clId="{CF1FAA12-072C-4ED5-BA76-0FFFAEFDB88A}" dt="2025-09-05T02:41:07.462" v="63" actId="20577"/>
-        <pc:sldMkLst>
-          <pc:docMk/>
-          <pc:sldMk cId="289959520" sldId="293"/>
-        </pc:sldMkLst>
-        <pc:spChg chg="mod">
-          <ac:chgData name="Zonghua Gu" userId="9a7e1853e1951ef5" providerId="LiveId" clId="{CF1FAA12-072C-4ED5-BA76-0FFFAEFDB88A}" dt="2025-09-05T02:41:07.462" v="63" actId="20577"/>
-          <ac:spMkLst>
-            <pc:docMk/>
-            <pc:sldMk cId="289959520" sldId="293"/>
-            <ac:spMk id="3" creationId="{1B2C01DF-FF3D-C020-33D0-F235B1B31AB7}"/>
-          </ac:spMkLst>
-        </pc:spChg>
-        <pc:spChg chg="del">
-          <ac:chgData name="Zonghua Gu" userId="9a7e1853e1951ef5" providerId="LiveId" clId="{CF1FAA12-072C-4ED5-BA76-0FFFAEFDB88A}" dt="2025-09-05T02:40:58.184" v="58" actId="478"/>
-          <ac:spMkLst>
-            <pc:docMk/>
-            <pc:sldMk cId="289959520" sldId="293"/>
-            <ac:spMk id="4" creationId="{22F2170D-6F52-01FA-E332-D923168C1EDE}"/>
-          </ac:spMkLst>
-        </pc:spChg>
-      </pc:sldChg>
-      <pc:sldChg chg="delSp modSp mod">
-        <pc:chgData name="Zonghua Gu" userId="9a7e1853e1951ef5" providerId="LiveId" clId="{CF1FAA12-072C-4ED5-BA76-0FFFAEFDB88A}" dt="2025-09-05T02:40:19.816" v="50" actId="20577"/>
-        <pc:sldMkLst>
-          <pc:docMk/>
-          <pc:sldMk cId="747926631" sldId="298"/>
-        </pc:sldMkLst>
-        <pc:spChg chg="mod">
-          <ac:chgData name="Zonghua Gu" userId="9a7e1853e1951ef5" providerId="LiveId" clId="{CF1FAA12-072C-4ED5-BA76-0FFFAEFDB88A}" dt="2025-09-05T02:40:19.816" v="50" actId="20577"/>
-          <ac:spMkLst>
-            <pc:docMk/>
-            <pc:sldMk cId="747926631" sldId="298"/>
-            <ac:spMk id="3" creationId="{08EA202D-2329-46FC-D16F-7F672EA47134}"/>
-          </ac:spMkLst>
-        </pc:spChg>
-        <pc:spChg chg="del">
-          <ac:chgData name="Zonghua Gu" userId="9a7e1853e1951ef5" providerId="LiveId" clId="{CF1FAA12-072C-4ED5-BA76-0FFFAEFDB88A}" dt="2025-09-05T02:40:07.356" v="22" actId="478"/>
-          <ac:spMkLst>
-            <pc:docMk/>
-            <pc:sldMk cId="747926631" sldId="298"/>
-            <ac:spMk id="4" creationId="{28DD35F1-0DFA-E584-9F82-156351DB9F54}"/>
-          </ac:spMkLst>
-        </pc:spChg>
-      </pc:sldChg>
-      <pc:sldChg chg="modSp mod">
-        <pc:chgData name="Zonghua Gu" userId="9a7e1853e1951ef5" providerId="LiveId" clId="{CF1FAA12-072C-4ED5-BA76-0FFFAEFDB88A}" dt="2025-09-05T02:42:37.007" v="78" actId="20577"/>
-        <pc:sldMkLst>
-          <pc:docMk/>
-          <pc:sldMk cId="0" sldId="299"/>
-        </pc:sldMkLst>
-        <pc:spChg chg="mod">
-          <ac:chgData name="Zonghua Gu" userId="9a7e1853e1951ef5" providerId="LiveId" clId="{CF1FAA12-072C-4ED5-BA76-0FFFAEFDB88A}" dt="2025-09-05T02:42:37.007" v="78" actId="20577"/>
-          <ac:spMkLst>
-            <pc:docMk/>
-            <pc:sldMk cId="0" sldId="299"/>
-            <ac:spMk id="134147" creationId="{CE953AE3-5CAF-12B2-BE9C-EDE56E337765}"/>
-          </ac:spMkLst>
-        </pc:spChg>
-      </pc:sldChg>
-      <pc:sldChg chg="delSp mod">
-        <pc:chgData name="Zonghua Gu" userId="9a7e1853e1951ef5" providerId="LiveId" clId="{CF1FAA12-072C-4ED5-BA76-0FFFAEFDB88A}" dt="2025-09-05T02:40:25.750" v="51" actId="478"/>
-        <pc:sldMkLst>
-          <pc:docMk/>
-          <pc:sldMk cId="4240962310" sldId="300"/>
-        </pc:sldMkLst>
-        <pc:spChg chg="del">
-          <ac:chgData name="Zonghua Gu" userId="9a7e1853e1951ef5" providerId="LiveId" clId="{CF1FAA12-072C-4ED5-BA76-0FFFAEFDB88A}" dt="2025-09-05T02:40:25.750" v="51" actId="478"/>
-          <ac:spMkLst>
-            <pc:docMk/>
-            <pc:sldMk cId="4240962310" sldId="300"/>
-            <ac:spMk id="4" creationId="{3F92FC57-F65E-53DD-575E-BBFA6A4C93F4}"/>
-          </ac:spMkLst>
-        </pc:spChg>
-      </pc:sldChg>
-      <pc:sldChg chg="modSp mod">
-        <pc:chgData name="Zonghua Gu" userId="9a7e1853e1951ef5" providerId="LiveId" clId="{CF1FAA12-072C-4ED5-BA76-0FFFAEFDB88A}" dt="2025-09-05T02:44:46.902" v="122" actId="20577"/>
-        <pc:sldMkLst>
-          <pc:docMk/>
-          <pc:sldMk cId="0" sldId="306"/>
-        </pc:sldMkLst>
-        <pc:spChg chg="mod">
-          <ac:chgData name="Zonghua Gu" userId="9a7e1853e1951ef5" providerId="LiveId" clId="{CF1FAA12-072C-4ED5-BA76-0FFFAEFDB88A}" dt="2025-09-05T02:44:46.902" v="122" actId="20577"/>
-          <ac:spMkLst>
-            <pc:docMk/>
-            <pc:sldMk cId="0" sldId="306"/>
-            <ac:spMk id="142339" creationId="{B7B9BAE2-5B77-4CA5-CCD1-DCB779806785}"/>
-          </ac:spMkLst>
-        </pc:spChg>
-      </pc:sldChg>
-      <pc:sldChg chg="modSp mod">
-        <pc:chgData name="Zonghua Gu" userId="9a7e1853e1951ef5" providerId="LiveId" clId="{CF1FAA12-072C-4ED5-BA76-0FFFAEFDB88A}" dt="2025-09-05T02:45:05.862" v="135" actId="20577"/>
-        <pc:sldMkLst>
-          <pc:docMk/>
-          <pc:sldMk cId="0" sldId="809"/>
-        </pc:sldMkLst>
-        <pc:spChg chg="mod">
-          <ac:chgData name="Zonghua Gu" userId="9a7e1853e1951ef5" providerId="LiveId" clId="{CF1FAA12-072C-4ED5-BA76-0FFFAEFDB88A}" dt="2025-09-05T02:45:05.862" v="135" actId="20577"/>
-          <ac:spMkLst>
-            <pc:docMk/>
-            <pc:sldMk cId="0" sldId="809"/>
-            <ac:spMk id="115715" creationId="{6FAAD509-C0EB-D3C7-7729-E2463120B77B}"/>
-          </ac:spMkLst>
-        </pc:spChg>
-      </pc:sldChg>
-      <pc:sldChg chg="modSp mod">
-        <pc:chgData name="Zonghua Gu" userId="9a7e1853e1951ef5" providerId="LiveId" clId="{CF1FAA12-072C-4ED5-BA76-0FFFAEFDB88A}" dt="2025-09-05T02:43:07.373" v="80" actId="20577"/>
-        <pc:sldMkLst>
-          <pc:docMk/>
-          <pc:sldMk cId="1021064887" sldId="821"/>
-        </pc:sldMkLst>
-        <pc:spChg chg="mod">
-          <ac:chgData name="Zonghua Gu" userId="9a7e1853e1951ef5" providerId="LiveId" clId="{CF1FAA12-072C-4ED5-BA76-0FFFAEFDB88A}" dt="2025-09-05T02:43:07.373" v="80" actId="20577"/>
-          <ac:spMkLst>
-            <pc:docMk/>
-            <pc:sldMk cId="1021064887" sldId="821"/>
-            <ac:spMk id="3" creationId="{DA94A7DF-21ED-3C73-F7B0-092CBE254CC3}"/>
+            <pc:sldMk cId="2837122745" sldId="825"/>
+            <ac:spMk id="3" creationId="{283CC9E1-8C3D-8F28-179D-AE7A263B34E7}"/>
           </ac:spMkLst>
         </pc:spChg>
       </pc:sldChg>
@@ -587,14 +340,14 @@
           <a:effectLst/>
           <a:extLst>
             <a:ext uri="{909E8E84-426E-40dd-AFC4-6F175D3DCCD1}">
-              <a14:hiddenFill xmlns="" xmlns:a14="http://schemas.microsoft.com/office/drawing/2010/main">
+              <a14:hiddenFill xmlns:a14="http://schemas.microsoft.com/office/drawing/2010/main" xmlns="">
                 <a:solidFill>
                   <a:schemeClr val="bg1"/>
                 </a:solidFill>
               </a14:hiddenFill>
             </a:ext>
             <a:ext uri="{91240B29-F687-4f45-9708-019B960494DF}">
-              <a14:hiddenLine xmlns="" xmlns:a14="http://schemas.microsoft.com/office/drawing/2010/main" w="12700">
+              <a14:hiddenLine xmlns:a14="http://schemas.microsoft.com/office/drawing/2010/main" xmlns="" w="12700">
                 <a:pattFill prst="narHorz">
                   <a:fgClr>
                     <a:schemeClr val="tx1"/>
@@ -609,7 +362,7 @@
               </a14:hiddenLine>
             </a:ext>
             <a:ext uri="{AF507438-7753-43e0-B8FC-AC1667EBCBE1}">
-              <a14:hiddenEffects xmlns="" xmlns:a14="http://schemas.microsoft.com/office/drawing/2010/main">
+              <a14:hiddenEffects xmlns:a14="http://schemas.microsoft.com/office/drawing/2010/main" xmlns="">
                 <a:effectLst>
                   <a:outerShdw dist="35921" dir="2700000" algn="ctr" rotWithShape="0">
                     <a:schemeClr val="bg2"/>
@@ -715,14 +468,14 @@
           <a:effectLst/>
           <a:extLst>
             <a:ext uri="{909E8E84-426E-40dd-AFC4-6F175D3DCCD1}">
-              <a14:hiddenFill xmlns="" xmlns:a14="http://schemas.microsoft.com/office/drawing/2010/main">
+              <a14:hiddenFill xmlns:a14="http://schemas.microsoft.com/office/drawing/2010/main" xmlns="">
                 <a:solidFill>
                   <a:schemeClr val="bg1"/>
                 </a:solidFill>
               </a14:hiddenFill>
             </a:ext>
             <a:ext uri="{91240B29-F687-4f45-9708-019B960494DF}">
-              <a14:hiddenLine xmlns="" xmlns:a14="http://schemas.microsoft.com/office/drawing/2010/main" w="12700">
+              <a14:hiddenLine xmlns:a14="http://schemas.microsoft.com/office/drawing/2010/main" xmlns="" w="12700">
                 <a:pattFill prst="narHorz">
                   <a:fgClr>
                     <a:schemeClr val="tx1"/>
@@ -737,7 +490,7 @@
               </a14:hiddenLine>
             </a:ext>
             <a:ext uri="{AF507438-7753-43e0-B8FC-AC1667EBCBE1}">
-              <a14:hiddenEffects xmlns="" xmlns:a14="http://schemas.microsoft.com/office/drawing/2010/main">
+              <a14:hiddenEffects xmlns:a14="http://schemas.microsoft.com/office/drawing/2010/main" xmlns="">
                 <a:effectLst>
                   <a:outerShdw dist="35921" dir="2700000" algn="ctr" rotWithShape="0">
                     <a:schemeClr val="bg2"/>
@@ -805,17 +558,17 @@
           <a:effectLst/>
           <a:extLst>
             <a:ext uri="{FAA26D3D-D897-4be2-8F04-BA451C77F1D7}">
-              <ma14:placeholderFlag xmlns="" xmlns:ma14="http://schemas.microsoft.com/office/mac/drawingml/2011/main" val="1"/>
+              <ma14:placeholderFlag xmlns:ma14="http://schemas.microsoft.com/office/mac/drawingml/2011/main" xmlns="" val="1"/>
             </a:ext>
             <a:ext uri="{909E8E84-426E-40dd-AFC4-6F175D3DCCD1}">
-              <a14:hiddenFill xmlns="" xmlns:a14="http://schemas.microsoft.com/office/drawing/2010/main">
+              <a14:hiddenFill xmlns:a14="http://schemas.microsoft.com/office/drawing/2010/main" xmlns="">
                 <a:solidFill>
                   <a:srgbClr val="FFFFFF"/>
                 </a:solidFill>
               </a14:hiddenFill>
             </a:ext>
             <a:ext uri="{AF507438-7753-43e0-B8FC-AC1667EBCBE1}">
-              <a14:hiddenEffects xmlns="" xmlns:a14="http://schemas.microsoft.com/office/drawing/2010/main">
+              <a14:hiddenEffects xmlns:a14="http://schemas.microsoft.com/office/drawing/2010/main" xmlns="">
                 <a:effectLst>
                   <a:outerShdw blurRad="63500" dist="38099" dir="2700000" algn="ctr" rotWithShape="0">
                     <a:srgbClr val="000000">
@@ -826,7 +579,7 @@
               </a14:hiddenEffects>
             </a:ext>
             <a:ext uri="{53640926-AAD7-44d8-BBD7-CCE9431645EC}">
-              <a14:shadowObscured xmlns="" xmlns:a14="http://schemas.microsoft.com/office/drawing/2010/main" val="1"/>
+              <a14:shadowObscured xmlns:a14="http://schemas.microsoft.com/office/drawing/2010/main" xmlns="" val="1"/>
             </a:ext>
           </a:extLst>
         </p:spPr>
@@ -856,14 +609,14 @@
           <a:effectLst/>
           <a:extLst>
             <a:ext uri="{909E8E84-426E-40dd-AFC4-6F175D3DCCD1}">
-              <a14:hiddenFill xmlns="" xmlns:a14="http://schemas.microsoft.com/office/drawing/2010/main">
+              <a14:hiddenFill xmlns:a14="http://schemas.microsoft.com/office/drawing/2010/main" xmlns="">
                 <a:solidFill>
                   <a:schemeClr val="bg1"/>
                 </a:solidFill>
               </a14:hiddenFill>
             </a:ext>
             <a:ext uri="{91240B29-F687-4f45-9708-019B960494DF}">
-              <a14:hiddenLine xmlns="" xmlns:a14="http://schemas.microsoft.com/office/drawing/2010/main" w="12700">
+              <a14:hiddenLine xmlns:a14="http://schemas.microsoft.com/office/drawing/2010/main" xmlns="" w="12700">
                 <a:pattFill prst="narHorz">
                   <a:fgClr>
                     <a:schemeClr val="tx1"/>
@@ -878,7 +631,7 @@
               </a14:hiddenLine>
             </a:ext>
             <a:ext uri="{AF507438-7753-43e0-B8FC-AC1667EBCBE1}">
-              <a14:hiddenEffects xmlns="" xmlns:a14="http://schemas.microsoft.com/office/drawing/2010/main">
+              <a14:hiddenEffects xmlns:a14="http://schemas.microsoft.com/office/drawing/2010/main" xmlns="">
                 <a:effectLst>
                   <a:outerShdw dist="35921" dir="2700000" algn="ctr" rotWithShape="0">
                     <a:schemeClr val="bg2"/>
@@ -1128,10 +881,10 @@
         <p:spPr>
           <a:extLst>
             <a:ext uri="{FAA26D3D-D897-4be2-8F04-BA451C77F1D7}">
-              <ma14:placeholderFlag xmlns:ma14="http://schemas.microsoft.com/office/mac/drawingml/2011/main" xmlns="" val="1"/>
+              <ma14:placeholderFlag xmlns="" xmlns:ma14="http://schemas.microsoft.com/office/mac/drawingml/2011/main" val="1"/>
             </a:ext>
             <a:ext uri="{AF507438-7753-43e0-B8FC-AC1667EBCBE1}">
-              <a14:hiddenEffects xmlns:a14="http://schemas.microsoft.com/office/drawing/2010/main" xmlns="">
+              <a14:hiddenEffects xmlns="" xmlns:a14="http://schemas.microsoft.com/office/drawing/2010/main">
                 <a:effectLst>
                   <a:outerShdw blurRad="63500" dist="38099" dir="2700000" algn="ctr" rotWithShape="0">
                     <a:schemeClr val="bg2">
@@ -10625,17 +10378,17 @@
           <a:effectLst/>
           <a:extLst>
             <a:ext uri="{FAA26D3D-D897-4be2-8F04-BA451C77F1D7}">
-              <ma14:placeholderFlag xmlns="" xmlns:ma14="http://schemas.microsoft.com/office/mac/drawingml/2011/main" val="1"/>
+              <ma14:placeholderFlag xmlns:ma14="http://schemas.microsoft.com/office/mac/drawingml/2011/main" xmlns="" val="1"/>
             </a:ext>
             <a:ext uri="{909E8E84-426E-40dd-AFC4-6F175D3DCCD1}">
-              <a14:hiddenFill xmlns="" xmlns:a14="http://schemas.microsoft.com/office/drawing/2010/main">
+              <a14:hiddenFill xmlns:a14="http://schemas.microsoft.com/office/drawing/2010/main" xmlns="">
                 <a:solidFill>
                   <a:schemeClr val="bg1"/>
                 </a:solidFill>
               </a14:hiddenFill>
             </a:ext>
             <a:ext uri="{91240B29-F687-4f45-9708-019B960494DF}">
-              <a14:hiddenLine xmlns="" xmlns:a14="http://schemas.microsoft.com/office/drawing/2010/main" w="12700">
+              <a14:hiddenLine xmlns:a14="http://schemas.microsoft.com/office/drawing/2010/main" xmlns="" w="12700">
                 <a:pattFill prst="narHorz">
                   <a:fgClr>
                     <a:schemeClr val="tx1"/>
@@ -10650,7 +10403,7 @@
               </a14:hiddenLine>
             </a:ext>
             <a:ext uri="{AF507438-7753-43e0-B8FC-AC1667EBCBE1}">
-              <a14:hiddenEffects xmlns="" xmlns:a14="http://schemas.microsoft.com/office/drawing/2010/main">
+              <a14:hiddenEffects xmlns:a14="http://schemas.microsoft.com/office/drawing/2010/main" xmlns="">
                 <a:effectLst>
                   <a:outerShdw blurRad="63500" dist="38099" dir="2700000" algn="ctr" rotWithShape="0">
                     <a:schemeClr val="bg2">
@@ -10703,17 +10456,17 @@
           <a:effectLst/>
           <a:extLst>
             <a:ext uri="{FAA26D3D-D897-4be2-8F04-BA451C77F1D7}">
-              <ma14:placeholderFlag xmlns="" xmlns:ma14="http://schemas.microsoft.com/office/mac/drawingml/2011/main" val="1"/>
+              <ma14:placeholderFlag xmlns:ma14="http://schemas.microsoft.com/office/mac/drawingml/2011/main" xmlns="" val="1"/>
             </a:ext>
             <a:ext uri="{909E8E84-426E-40dd-AFC4-6F175D3DCCD1}">
-              <a14:hiddenFill xmlns="" xmlns:a14="http://schemas.microsoft.com/office/drawing/2010/main">
+              <a14:hiddenFill xmlns:a14="http://schemas.microsoft.com/office/drawing/2010/main" xmlns="">
                 <a:solidFill>
                   <a:schemeClr val="bg1"/>
                 </a:solidFill>
               </a14:hiddenFill>
             </a:ext>
             <a:ext uri="{91240B29-F687-4f45-9708-019B960494DF}">
-              <a14:hiddenLine xmlns="" xmlns:a14="http://schemas.microsoft.com/office/drawing/2010/main" w="12700">
+              <a14:hiddenLine xmlns:a14="http://schemas.microsoft.com/office/drawing/2010/main" xmlns="" w="12700">
                 <a:pattFill prst="narHorz">
                   <a:fgClr>
                     <a:schemeClr val="tx1"/>
@@ -10728,7 +10481,7 @@
               </a14:hiddenLine>
             </a:ext>
             <a:ext uri="{AF507438-7753-43e0-B8FC-AC1667EBCBE1}">
-              <a14:hiddenEffects xmlns="" xmlns:a14="http://schemas.microsoft.com/office/drawing/2010/main">
+              <a14:hiddenEffects xmlns:a14="http://schemas.microsoft.com/office/drawing/2010/main" xmlns="">
                 <a:effectLst>
                   <a:outerShdw blurRad="63500" dist="38099" dir="2700000" algn="ctr" rotWithShape="0">
                     <a:schemeClr val="bg2">
@@ -10812,12 +10565,12 @@
           <a:effectLst/>
           <a:extLst>
             <a:ext uri="{909E8E84-426E-40dd-AFC4-6F175D3DCCD1}">
-              <a14:hiddenFill xmlns="" xmlns:a14="http://schemas.microsoft.com/office/drawing/2010/main">
+              <a14:hiddenFill xmlns:a14="http://schemas.microsoft.com/office/drawing/2010/main" xmlns="">
                 <a:noFill/>
               </a14:hiddenFill>
             </a:ext>
             <a:ext uri="{AF507438-7753-43e0-B8FC-AC1667EBCBE1}">
-              <a14:hiddenEffects xmlns="" xmlns:a14="http://schemas.microsoft.com/office/drawing/2010/main">
+              <a14:hiddenEffects xmlns:a14="http://schemas.microsoft.com/office/drawing/2010/main" xmlns="">
                 <a:effectLst>
                   <a:outerShdw blurRad="63500" dist="38099" dir="2700000" algn="ctr" rotWithShape="0">
                     <a:schemeClr val="bg2">
@@ -10872,14 +10625,14 @@
           <a:effectLst/>
           <a:extLst>
             <a:ext uri="{909E8E84-426E-40dd-AFC4-6F175D3DCCD1}">
-              <a14:hiddenFill xmlns="" xmlns:a14="http://schemas.microsoft.com/office/drawing/2010/main">
+              <a14:hiddenFill xmlns:a14="http://schemas.microsoft.com/office/drawing/2010/main" xmlns="">
                 <a:solidFill>
                   <a:schemeClr val="bg1"/>
                 </a:solidFill>
               </a14:hiddenFill>
             </a:ext>
             <a:ext uri="{91240B29-F687-4f45-9708-019B960494DF}">
-              <a14:hiddenLine xmlns="" xmlns:a14="http://schemas.microsoft.com/office/drawing/2010/main" w="12700">
+              <a14:hiddenLine xmlns:a14="http://schemas.microsoft.com/office/drawing/2010/main" xmlns="" w="12700">
                 <a:pattFill prst="narHorz">
                   <a:fgClr>
                     <a:schemeClr val="tx1"/>
@@ -10894,7 +10647,7 @@
               </a14:hiddenLine>
             </a:ext>
             <a:ext uri="{AF507438-7753-43e0-B8FC-AC1667EBCBE1}">
-              <a14:hiddenEffects xmlns="" xmlns:a14="http://schemas.microsoft.com/office/drawing/2010/main">
+              <a14:hiddenEffects xmlns:a14="http://schemas.microsoft.com/office/drawing/2010/main" xmlns="">
                 <a:effectLst>
                   <a:outerShdw dist="35921" dir="2700000" algn="ctr" rotWithShape="0">
                     <a:schemeClr val="bg2"/>
@@ -13824,17 +13577,17 @@
           <a:ln/>
           <a:extLst>
             <a:ext uri="{FAA26D3D-D897-4be2-8F04-BA451C77F1D7}">
-              <ma14:placeholderFlag xmlns="" xmlns:ma14="http://schemas.microsoft.com/office/mac/drawingml/2011/main" val="1"/>
+              <ma14:placeholderFlag xmlns:ma14="http://schemas.microsoft.com/office/mac/drawingml/2011/main" xmlns="" val="1"/>
             </a:ext>
             <a:ext uri="{909E8E84-426E-40dd-AFC4-6F175D3DCCD1}">
-              <a14:hiddenFill xmlns="" xmlns:a14="http://schemas.microsoft.com/office/drawing/2010/main">
+              <a14:hiddenFill xmlns:a14="http://schemas.microsoft.com/office/drawing/2010/main" xmlns="">
                 <a:solidFill>
                   <a:schemeClr val="bg1"/>
                 </a:solidFill>
               </a14:hiddenFill>
             </a:ext>
             <a:ext uri="{91240B29-F687-4f45-9708-019B960494DF}">
-              <a14:hiddenLine xmlns="" xmlns:a14="http://schemas.microsoft.com/office/drawing/2010/main" w="12700">
+              <a14:hiddenLine xmlns:a14="http://schemas.microsoft.com/office/drawing/2010/main" xmlns="" w="12700">
                 <a:pattFill prst="narHorz">
                   <a:fgClr>
                     <a:schemeClr val="tx1"/>
@@ -13849,7 +13602,7 @@
               </a14:hiddenLine>
             </a:ext>
             <a:ext uri="{AF507438-7753-43e0-B8FC-AC1667EBCBE1}">
-              <a14:hiddenEffects xmlns="" xmlns:a14="http://schemas.microsoft.com/office/drawing/2010/main">
+              <a14:hiddenEffects xmlns:a14="http://schemas.microsoft.com/office/drawing/2010/main" xmlns="">
                 <a:effectLst>
                   <a:outerShdw blurRad="63500" dist="38099" dir="2700000" algn="ctr" rotWithShape="0">
                     <a:schemeClr val="bg2">
@@ -19455,17 +19208,17 @@
           <a:effectLst/>
           <a:extLst>
             <a:ext uri="{FAA26D3D-D897-4be2-8F04-BA451C77F1D7}">
-              <ma14:placeholderFlag xmlns="" xmlns:ma14="http://schemas.microsoft.com/office/mac/drawingml/2011/main" val="1"/>
+              <ma14:placeholderFlag xmlns:ma14="http://schemas.microsoft.com/office/mac/drawingml/2011/main" xmlns="" val="1"/>
             </a:ext>
             <a:ext uri="{909E8E84-426E-40dd-AFC4-6F175D3DCCD1}">
-              <a14:hiddenFill xmlns="" xmlns:a14="http://schemas.microsoft.com/office/drawing/2010/main">
+              <a14:hiddenFill xmlns:a14="http://schemas.microsoft.com/office/drawing/2010/main" xmlns="">
                 <a:solidFill>
                   <a:schemeClr val="bg1"/>
                 </a:solidFill>
               </a14:hiddenFill>
             </a:ext>
             <a:ext uri="{91240B29-F687-4f45-9708-019B960494DF}">
-              <a14:hiddenLine xmlns="" xmlns:a14="http://schemas.microsoft.com/office/drawing/2010/main" w="12700">
+              <a14:hiddenLine xmlns:a14="http://schemas.microsoft.com/office/drawing/2010/main" xmlns="" w="12700">
                 <a:pattFill prst="narHorz">
                   <a:fgClr>
                     <a:schemeClr val="tx1"/>
@@ -19480,7 +19233,7 @@
               </a14:hiddenLine>
             </a:ext>
             <a:ext uri="{AF507438-7753-43e0-B8FC-AC1667EBCBE1}">
-              <a14:hiddenEffects xmlns="" xmlns:a14="http://schemas.microsoft.com/office/drawing/2010/main">
+              <a14:hiddenEffects xmlns:a14="http://schemas.microsoft.com/office/drawing/2010/main" xmlns="">
                 <a:effectLst>
                   <a:outerShdw blurRad="63500" dist="38099" dir="2700000" algn="ctr" rotWithShape="0">
                     <a:schemeClr val="bg2">
@@ -20906,7 +20659,7 @@
           </a:ln>
           <a:extLst>
             <a:ext uri="{AF507438-7753-43e0-B8FC-AC1667EBCBE1}">
-              <a14:hiddenEffects xmlns="" xmlns:a14="http://schemas.microsoft.com/office/drawing/2010/main">
+              <a14:hiddenEffects xmlns:a14="http://schemas.microsoft.com/office/drawing/2010/main" xmlns="">
                 <a:effectLst>
                   <a:outerShdw dist="35921" dir="2700000" algn="ctr" rotWithShape="0">
                     <a:schemeClr val="bg2"/>
@@ -20993,7 +20746,7 @@
           </a:ln>
           <a:extLst>
             <a:ext uri="{AF507438-7753-43e0-B8FC-AC1667EBCBE1}">
-              <a14:hiddenEffects xmlns="" xmlns:a14="http://schemas.microsoft.com/office/drawing/2010/main">
+              <a14:hiddenEffects xmlns:a14="http://schemas.microsoft.com/office/drawing/2010/main" xmlns="">
                 <a:effectLst>
                   <a:outerShdw dist="35921" dir="2700000" algn="ctr" rotWithShape="0">
                     <a:schemeClr val="bg2"/>
@@ -21166,7 +20919,7 @@
           </a:ln>
           <a:extLst>
             <a:ext uri="{AF507438-7753-43e0-B8FC-AC1667EBCBE1}">
-              <a14:hiddenEffects xmlns="" xmlns:a14="http://schemas.microsoft.com/office/drawing/2010/main">
+              <a14:hiddenEffects xmlns:a14="http://schemas.microsoft.com/office/drawing/2010/main" xmlns="">
                 <a:effectLst>
                   <a:outerShdw dist="35921" dir="2700000" algn="ctr" rotWithShape="0">
                     <a:schemeClr val="bg2"/>
@@ -24082,17 +23835,17 @@
           <a:effectLst/>
           <a:extLst>
             <a:ext uri="{FAA26D3D-D897-4be2-8F04-BA451C77F1D7}">
-              <ma14:placeholderFlag xmlns="" xmlns:ma14="http://schemas.microsoft.com/office/mac/drawingml/2011/main" val="1"/>
+              <ma14:placeholderFlag xmlns:ma14="http://schemas.microsoft.com/office/mac/drawingml/2011/main" xmlns="" val="1"/>
             </a:ext>
             <a:ext uri="{909E8E84-426E-40dd-AFC4-6F175D3DCCD1}">
-              <a14:hiddenFill xmlns="" xmlns:a14="http://schemas.microsoft.com/office/drawing/2010/main">
+              <a14:hiddenFill xmlns:a14="http://schemas.microsoft.com/office/drawing/2010/main" xmlns="">
                 <a:solidFill>
                   <a:schemeClr val="bg1"/>
                 </a:solidFill>
               </a14:hiddenFill>
             </a:ext>
             <a:ext uri="{91240B29-F687-4f45-9708-019B960494DF}">
-              <a14:hiddenLine xmlns="" xmlns:a14="http://schemas.microsoft.com/office/drawing/2010/main" w="12700">
+              <a14:hiddenLine xmlns:a14="http://schemas.microsoft.com/office/drawing/2010/main" xmlns="" w="12700">
                 <a:pattFill prst="narHorz">
                   <a:fgClr>
                     <a:schemeClr val="tx1"/>
@@ -24107,7 +23860,7 @@
               </a14:hiddenLine>
             </a:ext>
             <a:ext uri="{AF507438-7753-43e0-B8FC-AC1667EBCBE1}">
-              <a14:hiddenEffects xmlns="" xmlns:a14="http://schemas.microsoft.com/office/drawing/2010/main">
+              <a14:hiddenEffects xmlns:a14="http://schemas.microsoft.com/office/drawing/2010/main" xmlns="">
                 <a:effectLst>
                   <a:outerShdw blurRad="63500" dist="38099" dir="2700000" algn="ctr" rotWithShape="0">
                     <a:schemeClr val="bg2">
@@ -33461,17 +33214,17 @@
           <a:effectLst/>
           <a:extLst>
             <a:ext uri="{FAA26D3D-D897-4be2-8F04-BA451C77F1D7}">
-              <ma14:placeholderFlag xmlns="" xmlns:ma14="http://schemas.microsoft.com/office/mac/drawingml/2011/main" val="1"/>
+              <ma14:placeholderFlag xmlns:ma14="http://schemas.microsoft.com/office/mac/drawingml/2011/main" xmlns="" val="1"/>
             </a:ext>
             <a:ext uri="{909E8E84-426E-40dd-AFC4-6F175D3DCCD1}">
-              <a14:hiddenFill xmlns="" xmlns:a14="http://schemas.microsoft.com/office/drawing/2010/main">
+              <a14:hiddenFill xmlns:a14="http://schemas.microsoft.com/office/drawing/2010/main" xmlns="">
                 <a:solidFill>
                   <a:schemeClr val="bg1"/>
                 </a:solidFill>
               </a14:hiddenFill>
             </a:ext>
             <a:ext uri="{91240B29-F687-4f45-9708-019B960494DF}">
-              <a14:hiddenLine xmlns="" xmlns:a14="http://schemas.microsoft.com/office/drawing/2010/main" w="12700">
+              <a14:hiddenLine xmlns:a14="http://schemas.microsoft.com/office/drawing/2010/main" xmlns="" w="12700">
                 <a:pattFill prst="narHorz">
                   <a:fgClr>
                     <a:schemeClr val="tx1"/>
@@ -33486,7 +33239,7 @@
               </a14:hiddenLine>
             </a:ext>
             <a:ext uri="{AF507438-7753-43e0-B8FC-AC1667EBCBE1}">
-              <a14:hiddenEffects xmlns="" xmlns:a14="http://schemas.microsoft.com/office/drawing/2010/main">
+              <a14:hiddenEffects xmlns:a14="http://schemas.microsoft.com/office/drawing/2010/main" xmlns="">
                 <a:effectLst>
                   <a:outerShdw blurRad="63500" dist="38099" dir="2700000" algn="ctr" rotWithShape="0">
                     <a:schemeClr val="bg2">
@@ -34425,7 +34178,7 @@
           </a:ln>
           <a:extLst>
             <a:ext uri="{AF507438-7753-43e0-B8FC-AC1667EBCBE1}">
-              <a14:hiddenEffects xmlns="" xmlns:a14="http://schemas.microsoft.com/office/drawing/2010/main">
+              <a14:hiddenEffects xmlns:a14="http://schemas.microsoft.com/office/drawing/2010/main" xmlns="">
                 <a:effectLst>
                   <a:outerShdw dist="35921" dir="2700000" algn="ctr" rotWithShape="0">
                     <a:schemeClr val="bg2"/>
@@ -36297,6 +36050,111 @@
   <p:clrMapOvr>
     <a:masterClrMapping/>
   </p:clrMapOvr>
+</p:sld>
+</file>
+
+<file path=ppt/slides/slide40.xml><?xml version="1.0" encoding="utf-8"?>
+<p:sld xmlns:a="http://schemas.openxmlformats.org/drawingml/2006/main" xmlns:r="http://schemas.openxmlformats.org/officeDocument/2006/relationships" xmlns:p="http://schemas.openxmlformats.org/presentationml/2006/main">
+  <p:cSld>
+    <p:spTree>
+      <p:nvGrpSpPr>
+        <p:cNvPr id="1" name=""/>
+        <p:cNvGrpSpPr/>
+        <p:nvPr/>
+      </p:nvGrpSpPr>
+      <p:grpSpPr>
+        <a:xfrm>
+          <a:off x="0" y="0"/>
+          <a:ext cx="0" cy="0"/>
+          <a:chOff x="0" y="0"/>
+          <a:chExt cx="0" cy="0"/>
+        </a:xfrm>
+      </p:grpSpPr>
+      <p:sp>
+        <p:nvSpPr>
+          <p:cNvPr id="2" name="Title 1">
+            <a:extLst>
+              <a:ext uri="{FF2B5EF4-FFF2-40B4-BE49-F238E27FC236}">
+                <a16:creationId xmlns:a16="http://schemas.microsoft.com/office/drawing/2014/main" id="{9E114B97-3E14-9811-9760-3827DC98046F}"/>
+              </a:ext>
+            </a:extLst>
+          </p:cNvPr>
+          <p:cNvSpPr>
+            <a:spLocks noGrp="1"/>
+          </p:cNvSpPr>
+          <p:nvPr>
+            <p:ph type="title"/>
+          </p:nvPr>
+        </p:nvSpPr>
+        <p:spPr/>
+        <p:txBody>
+          <a:bodyPr/>
+          <a:lstStyle/>
+          <a:p>
+            <a:r>
+              <a:rPr lang="en-US" dirty="0"/>
+              <a:t>References</a:t>
+            </a:r>
+          </a:p>
+        </p:txBody>
+      </p:sp>
+      <p:sp>
+        <p:nvSpPr>
+          <p:cNvPr id="3" name="Content Placeholder 2">
+            <a:extLst>
+              <a:ext uri="{FF2B5EF4-FFF2-40B4-BE49-F238E27FC236}">
+                <a16:creationId xmlns:a16="http://schemas.microsoft.com/office/drawing/2014/main" id="{283CC9E1-8C3D-8F28-179D-AE7A263B34E7}"/>
+              </a:ext>
+            </a:extLst>
+          </p:cNvPr>
+          <p:cNvSpPr>
+            <a:spLocks noGrp="1"/>
+          </p:cNvSpPr>
+          <p:nvPr>
+            <p:ph idx="1"/>
+          </p:nvPr>
+        </p:nvSpPr>
+        <p:spPr/>
+        <p:txBody>
+          <a:bodyPr/>
+          <a:lstStyle/>
+          <a:p>
+            <a:r>
+              <a:rPr lang="en-US" dirty="0"/>
+              <a:t>Concurrency Vs Parallelism! </a:t>
+            </a:r>
+            <a:r>
+              <a:rPr lang="en-US" dirty="0" err="1"/>
+              <a:t>ByteByteGo</a:t>
+            </a:r>
+            <a:endParaRPr lang="en-US" dirty="0"/>
+          </a:p>
+          <a:p>
+            <a:pPr lvl="1"/>
+            <a:r>
+              <a:rPr lang="en-US" dirty="0">
+                <a:hlinkClick r:id="rId2"/>
+              </a:rPr>
+              <a:t>https://www.youtube.com/watch?v=RlM9AfWf1WU</a:t>
+            </a:r>
+            <a:r>
+              <a:rPr lang="en-US" dirty="0"/>
+              <a:t> </a:t>
+            </a:r>
+          </a:p>
+        </p:txBody>
+      </p:sp>
+    </p:spTree>
+    <p:extLst>
+      <p:ext uri="{BB962C8B-B14F-4D97-AF65-F5344CB8AC3E}">
+        <p14:creationId xmlns:p14="http://schemas.microsoft.com/office/powerpoint/2010/main" val="2837122745"/>
+      </p:ext>
+    </p:extLst>
+  </p:cSld>
+  <p:clrMapOvr>
+    <a:masterClrMapping/>
+  </p:clrMapOvr>
+  <p:transition/>
 </p:sld>
 </file>
 
@@ -42656,7 +42514,7 @@
         <a:effectLst/>
         <a:extLst>
           <a:ext uri="{AF507438-7753-43e0-B8FC-AC1667EBCBE1}">
-            <a14:hiddenEffects xmlns:a14="http://schemas.microsoft.com/office/drawing/2010/main" xmlns="">
+            <a14:hiddenEffects xmlns="" xmlns:a14="http://schemas.microsoft.com/office/drawing/2010/main">
               <a:effectLst>
                 <a:outerShdw dist="35921" dir="2700000" algn="ctr" rotWithShape="0">
                   <a:schemeClr val="bg2"/>
@@ -42729,7 +42587,7 @@
         <a:effectLst/>
         <a:extLst>
           <a:ext uri="{AF507438-7753-43e0-B8FC-AC1667EBCBE1}">
-            <a14:hiddenEffects xmlns:a14="http://schemas.microsoft.com/office/drawing/2010/main" xmlns="">
+            <a14:hiddenEffects xmlns="" xmlns:a14="http://schemas.microsoft.com/office/drawing/2010/main">
               <a:effectLst>
                 <a:outerShdw dist="35921" dir="2700000" algn="ctr" rotWithShape="0">
                   <a:schemeClr val="bg2"/>
